--- a/linear-algebra/matrix-vector-operations/Matrix-vector operations.pptx
+++ b/linear-algebra/matrix-vector-operations/Matrix-vector operations.pptx
@@ -109,6 +109,11 @@
       </a:defRPr>
     </a:lvl9pPr>
   </p:defaultTextStyle>
+  <p:extLst>
+    <p:ext uri="{EFAFB233-063F-42B5-8137-9DF3F51BA10A}">
+      <p15:sldGuideLst xmlns:p15="http://schemas.microsoft.com/office/powerpoint/2012/main"/>
+    </p:ext>
+  </p:extLst>
 </p:presentation>
 </file>
 
@@ -259,7 +264,7 @@
           <a:p>
             <a:fld id="{A875B10F-F7F2-40EF-9E54-778E158512B4}" type="datetimeFigureOut">
               <a:rPr lang="nl-NL" smtClean="0"/>
-              <a:t>18-9-2026</a:t>
+              <a:t>22-9-2026</a:t>
             </a:fld>
             <a:endParaRPr lang="nl-NL"/>
           </a:p>
@@ -457,7 +462,7 @@
           <a:p>
             <a:fld id="{A875B10F-F7F2-40EF-9E54-778E158512B4}" type="datetimeFigureOut">
               <a:rPr lang="nl-NL" smtClean="0"/>
-              <a:t>18-9-2026</a:t>
+              <a:t>22-9-2026</a:t>
             </a:fld>
             <a:endParaRPr lang="nl-NL"/>
           </a:p>
@@ -665,7 +670,7 @@
           <a:p>
             <a:fld id="{A875B10F-F7F2-40EF-9E54-778E158512B4}" type="datetimeFigureOut">
               <a:rPr lang="nl-NL" smtClean="0"/>
-              <a:t>18-9-2026</a:t>
+              <a:t>22-9-2026</a:t>
             </a:fld>
             <a:endParaRPr lang="nl-NL"/>
           </a:p>
@@ -863,7 +868,7 @@
           <a:p>
             <a:fld id="{A875B10F-F7F2-40EF-9E54-778E158512B4}" type="datetimeFigureOut">
               <a:rPr lang="nl-NL" smtClean="0"/>
-              <a:t>18-9-2026</a:t>
+              <a:t>22-9-2026</a:t>
             </a:fld>
             <a:endParaRPr lang="nl-NL"/>
           </a:p>
@@ -1138,7 +1143,7 @@
           <a:p>
             <a:fld id="{A875B10F-F7F2-40EF-9E54-778E158512B4}" type="datetimeFigureOut">
               <a:rPr lang="nl-NL" smtClean="0"/>
-              <a:t>18-9-2026</a:t>
+              <a:t>22-9-2026</a:t>
             </a:fld>
             <a:endParaRPr lang="nl-NL"/>
           </a:p>
@@ -1403,7 +1408,7 @@
           <a:p>
             <a:fld id="{A875B10F-F7F2-40EF-9E54-778E158512B4}" type="datetimeFigureOut">
               <a:rPr lang="nl-NL" smtClean="0"/>
-              <a:t>18-9-2026</a:t>
+              <a:t>22-9-2026</a:t>
             </a:fld>
             <a:endParaRPr lang="nl-NL"/>
           </a:p>
@@ -1815,7 +1820,7 @@
           <a:p>
             <a:fld id="{A875B10F-F7F2-40EF-9E54-778E158512B4}" type="datetimeFigureOut">
               <a:rPr lang="nl-NL" smtClean="0"/>
-              <a:t>18-9-2026</a:t>
+              <a:t>22-9-2026</a:t>
             </a:fld>
             <a:endParaRPr lang="nl-NL"/>
           </a:p>
@@ -1956,7 +1961,7 @@
           <a:p>
             <a:fld id="{A875B10F-F7F2-40EF-9E54-778E158512B4}" type="datetimeFigureOut">
               <a:rPr lang="nl-NL" smtClean="0"/>
-              <a:t>18-9-2026</a:t>
+              <a:t>22-9-2026</a:t>
             </a:fld>
             <a:endParaRPr lang="nl-NL"/>
           </a:p>
@@ -2069,7 +2074,7 @@
           <a:p>
             <a:fld id="{A875B10F-F7F2-40EF-9E54-778E158512B4}" type="datetimeFigureOut">
               <a:rPr lang="nl-NL" smtClean="0"/>
-              <a:t>18-9-2026</a:t>
+              <a:t>22-9-2026</a:t>
             </a:fld>
             <a:endParaRPr lang="nl-NL"/>
           </a:p>
@@ -2380,7 +2385,7 @@
           <a:p>
             <a:fld id="{A875B10F-F7F2-40EF-9E54-778E158512B4}" type="datetimeFigureOut">
               <a:rPr lang="nl-NL" smtClean="0"/>
-              <a:t>18-9-2026</a:t>
+              <a:t>22-9-2026</a:t>
             </a:fld>
             <a:endParaRPr lang="nl-NL"/>
           </a:p>
@@ -2668,7 +2673,7 @@
           <a:p>
             <a:fld id="{A875B10F-F7F2-40EF-9E54-778E158512B4}" type="datetimeFigureOut">
               <a:rPr lang="nl-NL" smtClean="0"/>
-              <a:t>18-9-2026</a:t>
+              <a:t>22-9-2026</a:t>
             </a:fld>
             <a:endParaRPr lang="nl-NL"/>
           </a:p>
@@ -2909,7 +2914,7 @@
           <a:p>
             <a:fld id="{A875B10F-F7F2-40EF-9E54-778E158512B4}" type="datetimeFigureOut">
               <a:rPr lang="nl-NL" smtClean="0"/>
-              <a:t>18-9-2026</a:t>
+              <a:t>22-9-2026</a:t>
             </a:fld>
             <a:endParaRPr lang="nl-NL"/>
           </a:p>
@@ -3653,6 +3658,42 @@
           <a:xfrm>
             <a:off x="0" y="95250"/>
             <a:ext cx="12192000" cy="6665913"/>
+          </a:xfrm>
+          <a:prstGeom prst="rect">
+            <a:avLst/>
+          </a:prstGeom>
+        </p:spPr>
+      </p:pic>
+      <p:pic>
+        <p:nvPicPr>
+          <p:cNvPr id="4" name="Afbeelding 3">
+            <a:extLst>
+              <a:ext uri="{FF2B5EF4-FFF2-40B4-BE49-F238E27FC236}">
+                <a16:creationId xmlns:a16="http://schemas.microsoft.com/office/drawing/2014/main" id="{0AA9EBCE-B466-28E0-B2E4-5E0398E6A7BC}"/>
+              </a:ext>
+            </a:extLst>
+          </p:cNvPr>
+          <p:cNvPicPr>
+            <a:picLocks noChangeAspect="1"/>
+          </p:cNvPicPr>
+          <p:nvPr/>
+        </p:nvPicPr>
+        <p:blipFill>
+          <a:blip r:embed="rId3">
+            <a:extLst>
+              <a:ext uri="{28A0092B-C50C-407E-A947-70E740481C1C}">
+                <a14:useLocalDpi xmlns:a14="http://schemas.microsoft.com/office/drawing/2010/main" val="0"/>
+              </a:ext>
+            </a:extLst>
+          </a:blip>
+          <a:stretch>
+            <a:fillRect/>
+          </a:stretch>
+        </p:blipFill>
+        <p:spPr>
+          <a:xfrm>
+            <a:off x="0" y="95250"/>
+            <a:ext cx="12192000" cy="6672967"/>
           </a:xfrm>
           <a:prstGeom prst="rect">
             <a:avLst/>
